--- a/bkup/Channels/Neural Beats/TMP.pptx
+++ b/bkup/Channels/Neural Beats/TMP.pptx
@@ -259,7 +259,7 @@
           <a:p>
             <a:fld id="{08A27A93-A3EA-407B-B9A7-8DCE39923709}" type="datetimeFigureOut">
               <a:rPr kumimoji="1" lang="ja-JP" altLang="en-US" smtClean="0"/>
-              <a:t>2026/10/12</a:t>
+              <a:t>2026/10/13</a:t>
             </a:fld>
             <a:endParaRPr kumimoji="1" lang="ja-JP" altLang="en-US"/>
           </a:p>
@@ -489,7 +489,7 @@
           <a:p>
             <a:fld id="{08A27A93-A3EA-407B-B9A7-8DCE39923709}" type="datetimeFigureOut">
               <a:rPr kumimoji="1" lang="ja-JP" altLang="en-US" smtClean="0"/>
-              <a:t>2026/10/12</a:t>
+              <a:t>2026/10/13</a:t>
             </a:fld>
             <a:endParaRPr kumimoji="1" lang="ja-JP" altLang="en-US"/>
           </a:p>
@@ -729,7 +729,7 @@
           <a:p>
             <a:fld id="{08A27A93-A3EA-407B-B9A7-8DCE39923709}" type="datetimeFigureOut">
               <a:rPr kumimoji="1" lang="ja-JP" altLang="en-US" smtClean="0"/>
-              <a:t>2026/10/12</a:t>
+              <a:t>2026/10/13</a:t>
             </a:fld>
             <a:endParaRPr kumimoji="1" lang="ja-JP" altLang="en-US"/>
           </a:p>
@@ -959,7 +959,7 @@
           <a:p>
             <a:fld id="{08A27A93-A3EA-407B-B9A7-8DCE39923709}" type="datetimeFigureOut">
               <a:rPr kumimoji="1" lang="ja-JP" altLang="en-US" smtClean="0"/>
-              <a:t>2026/10/12</a:t>
+              <a:t>2026/10/13</a:t>
             </a:fld>
             <a:endParaRPr kumimoji="1" lang="ja-JP" altLang="en-US"/>
           </a:p>
@@ -1234,7 +1234,7 @@
           <a:p>
             <a:fld id="{08A27A93-A3EA-407B-B9A7-8DCE39923709}" type="datetimeFigureOut">
               <a:rPr kumimoji="1" lang="ja-JP" altLang="en-US" smtClean="0"/>
-              <a:t>2026/10/12</a:t>
+              <a:t>2026/10/13</a:t>
             </a:fld>
             <a:endParaRPr kumimoji="1" lang="ja-JP" altLang="en-US"/>
           </a:p>
@@ -1563,7 +1563,7 @@
           <a:p>
             <a:fld id="{08A27A93-A3EA-407B-B9A7-8DCE39923709}" type="datetimeFigureOut">
               <a:rPr kumimoji="1" lang="ja-JP" altLang="en-US" smtClean="0"/>
-              <a:t>2026/10/12</a:t>
+              <a:t>2026/10/13</a:t>
             </a:fld>
             <a:endParaRPr kumimoji="1" lang="ja-JP" altLang="en-US"/>
           </a:p>
@@ -2039,7 +2039,7 @@
           <a:p>
             <a:fld id="{08A27A93-A3EA-407B-B9A7-8DCE39923709}" type="datetimeFigureOut">
               <a:rPr kumimoji="1" lang="ja-JP" altLang="en-US" smtClean="0"/>
-              <a:t>2026/10/12</a:t>
+              <a:t>2026/10/13</a:t>
             </a:fld>
             <a:endParaRPr kumimoji="1" lang="ja-JP" altLang="en-US"/>
           </a:p>
@@ -2180,7 +2180,7 @@
           <a:p>
             <a:fld id="{08A27A93-A3EA-407B-B9A7-8DCE39923709}" type="datetimeFigureOut">
               <a:rPr kumimoji="1" lang="ja-JP" altLang="en-US" smtClean="0"/>
-              <a:t>2026/10/12</a:t>
+              <a:t>2026/10/13</a:t>
             </a:fld>
             <a:endParaRPr kumimoji="1" lang="ja-JP" altLang="en-US"/>
           </a:p>
@@ -2293,7 +2293,7 @@
           <a:p>
             <a:fld id="{08A27A93-A3EA-407B-B9A7-8DCE39923709}" type="datetimeFigureOut">
               <a:rPr kumimoji="1" lang="ja-JP" altLang="en-US" smtClean="0"/>
-              <a:t>2026/10/12</a:t>
+              <a:t>2026/10/13</a:t>
             </a:fld>
             <a:endParaRPr kumimoji="1" lang="ja-JP" altLang="en-US"/>
           </a:p>
@@ -2636,7 +2636,7 @@
           <a:p>
             <a:fld id="{08A27A93-A3EA-407B-B9A7-8DCE39923709}" type="datetimeFigureOut">
               <a:rPr kumimoji="1" lang="ja-JP" altLang="en-US" smtClean="0"/>
-              <a:t>2026/10/12</a:t>
+              <a:t>2026/10/13</a:t>
             </a:fld>
             <a:endParaRPr kumimoji="1" lang="ja-JP" altLang="en-US"/>
           </a:p>
@@ -2924,7 +2924,7 @@
           <a:p>
             <a:fld id="{08A27A93-A3EA-407B-B9A7-8DCE39923709}" type="datetimeFigureOut">
               <a:rPr kumimoji="1" lang="ja-JP" altLang="en-US" smtClean="0"/>
-              <a:t>2026/10/12</a:t>
+              <a:t>2026/10/13</a:t>
             </a:fld>
             <a:endParaRPr kumimoji="1" lang="ja-JP" altLang="en-US"/>
           </a:p>
@@ -3197,7 +3197,7 @@
           <a:p>
             <a:fld id="{08A27A93-A3EA-407B-B9A7-8DCE39923709}" type="datetimeFigureOut">
               <a:rPr kumimoji="1" lang="ja-JP" altLang="en-US" smtClean="0"/>
-              <a:t>2026/10/12</a:t>
+              <a:t>2026/10/13</a:t>
             </a:fld>
             <a:endParaRPr kumimoji="1" lang="ja-JP" altLang="en-US"/>
           </a:p>
@@ -3616,10 +3616,10 @@
       </p:grpSpPr>
       <p:pic>
         <p:nvPicPr>
-          <p:cNvPr id="5" name="図 4">
-            <a:extLst>
-              <a:ext uri="{FF2B5EF4-FFF2-40B4-BE49-F238E27FC236}">
-                <a16:creationId xmlns:a16="http://schemas.microsoft.com/office/drawing/2014/main" id="{6AD4FB4D-ED43-D686-6709-3C706D1D7CE9}"/>
+          <p:cNvPr id="10" name="図 9">
+            <a:extLst>
+              <a:ext uri="{FF2B5EF4-FFF2-40B4-BE49-F238E27FC236}">
+                <a16:creationId xmlns:a16="http://schemas.microsoft.com/office/drawing/2014/main" id="{77FA785F-89EC-56C9-E906-6CB6E94017D5}"/>
               </a:ext>
             </a:extLst>
           </p:cNvPr>
@@ -3629,27 +3629,15 @@
           <p:nvPr/>
         </p:nvPicPr>
         <p:blipFill>
-          <a:blip r:embed="rId2">
-            <a:extLst>
-              <a:ext uri="{BEBA8EAE-BF5A-486C-A8C5-ECC9F3942E4B}">
-                <a14:imgProps xmlns:a14="http://schemas.microsoft.com/office/drawing/2010/main">
-                  <a14:imgLayer r:embed="rId3">
-                    <a14:imgEffect>
-                      <a14:brightnessContrast bright="20000"/>
-                    </a14:imgEffect>
-                  </a14:imgLayer>
-                </a14:imgProps>
-              </a:ext>
-            </a:extLst>
-          </a:blip>
-          <a:srcRect l="6143" t="8180" r="10154" b="7808"/>
+          <a:blip r:embed="rId2"/>
+          <a:srcRect t="1809" r="4681" b="2521"/>
           <a:stretch>
             <a:fillRect/>
           </a:stretch>
         </p:blipFill>
         <p:spPr>
           <a:xfrm>
-            <a:off x="0" y="0"/>
+            <a:off x="1" y="0"/>
             <a:ext cx="12192000" cy="6858000"/>
           </a:xfrm>
           <a:prstGeom prst="rect">

--- a/bkup/Channels/Neural Beats/TMP.pptx
+++ b/bkup/Channels/Neural Beats/TMP.pptx
@@ -259,7 +259,7 @@
           <a:p>
             <a:fld id="{08A27A93-A3EA-407B-B9A7-8DCE39923709}" type="datetimeFigureOut">
               <a:rPr kumimoji="1" lang="ja-JP" altLang="en-US" smtClean="0"/>
-              <a:t>2026/10/13</a:t>
+              <a:t>2026/10/16</a:t>
             </a:fld>
             <a:endParaRPr kumimoji="1" lang="ja-JP" altLang="en-US"/>
           </a:p>
@@ -489,7 +489,7 @@
           <a:p>
             <a:fld id="{08A27A93-A3EA-407B-B9A7-8DCE39923709}" type="datetimeFigureOut">
               <a:rPr kumimoji="1" lang="ja-JP" altLang="en-US" smtClean="0"/>
-              <a:t>2026/10/13</a:t>
+              <a:t>2026/10/16</a:t>
             </a:fld>
             <a:endParaRPr kumimoji="1" lang="ja-JP" altLang="en-US"/>
           </a:p>
@@ -729,7 +729,7 @@
           <a:p>
             <a:fld id="{08A27A93-A3EA-407B-B9A7-8DCE39923709}" type="datetimeFigureOut">
               <a:rPr kumimoji="1" lang="ja-JP" altLang="en-US" smtClean="0"/>
-              <a:t>2026/10/13</a:t>
+              <a:t>2026/10/16</a:t>
             </a:fld>
             <a:endParaRPr kumimoji="1" lang="ja-JP" altLang="en-US"/>
           </a:p>
@@ -959,7 +959,7 @@
           <a:p>
             <a:fld id="{08A27A93-A3EA-407B-B9A7-8DCE39923709}" type="datetimeFigureOut">
               <a:rPr kumimoji="1" lang="ja-JP" altLang="en-US" smtClean="0"/>
-              <a:t>2026/10/13</a:t>
+              <a:t>2026/10/16</a:t>
             </a:fld>
             <a:endParaRPr kumimoji="1" lang="ja-JP" altLang="en-US"/>
           </a:p>
@@ -1234,7 +1234,7 @@
           <a:p>
             <a:fld id="{08A27A93-A3EA-407B-B9A7-8DCE39923709}" type="datetimeFigureOut">
               <a:rPr kumimoji="1" lang="ja-JP" altLang="en-US" smtClean="0"/>
-              <a:t>2026/10/13</a:t>
+              <a:t>2026/10/16</a:t>
             </a:fld>
             <a:endParaRPr kumimoji="1" lang="ja-JP" altLang="en-US"/>
           </a:p>
@@ -1563,7 +1563,7 @@
           <a:p>
             <a:fld id="{08A27A93-A3EA-407B-B9A7-8DCE39923709}" type="datetimeFigureOut">
               <a:rPr kumimoji="1" lang="ja-JP" altLang="en-US" smtClean="0"/>
-              <a:t>2026/10/13</a:t>
+              <a:t>2026/10/16</a:t>
             </a:fld>
             <a:endParaRPr kumimoji="1" lang="ja-JP" altLang="en-US"/>
           </a:p>
@@ -2039,7 +2039,7 @@
           <a:p>
             <a:fld id="{08A27A93-A3EA-407B-B9A7-8DCE39923709}" type="datetimeFigureOut">
               <a:rPr kumimoji="1" lang="ja-JP" altLang="en-US" smtClean="0"/>
-              <a:t>2026/10/13</a:t>
+              <a:t>2026/10/16</a:t>
             </a:fld>
             <a:endParaRPr kumimoji="1" lang="ja-JP" altLang="en-US"/>
           </a:p>
@@ -2180,7 +2180,7 @@
           <a:p>
             <a:fld id="{08A27A93-A3EA-407B-B9A7-8DCE39923709}" type="datetimeFigureOut">
               <a:rPr kumimoji="1" lang="ja-JP" altLang="en-US" smtClean="0"/>
-              <a:t>2026/10/13</a:t>
+              <a:t>2026/10/16</a:t>
             </a:fld>
             <a:endParaRPr kumimoji="1" lang="ja-JP" altLang="en-US"/>
           </a:p>
@@ -2293,7 +2293,7 @@
           <a:p>
             <a:fld id="{08A27A93-A3EA-407B-B9A7-8DCE39923709}" type="datetimeFigureOut">
               <a:rPr kumimoji="1" lang="ja-JP" altLang="en-US" smtClean="0"/>
-              <a:t>2026/10/13</a:t>
+              <a:t>2026/10/16</a:t>
             </a:fld>
             <a:endParaRPr kumimoji="1" lang="ja-JP" altLang="en-US"/>
           </a:p>
@@ -2636,7 +2636,7 @@
           <a:p>
             <a:fld id="{08A27A93-A3EA-407B-B9A7-8DCE39923709}" type="datetimeFigureOut">
               <a:rPr kumimoji="1" lang="ja-JP" altLang="en-US" smtClean="0"/>
-              <a:t>2026/10/13</a:t>
+              <a:t>2026/10/16</a:t>
             </a:fld>
             <a:endParaRPr kumimoji="1" lang="ja-JP" altLang="en-US"/>
           </a:p>
@@ -2924,7 +2924,7 @@
           <a:p>
             <a:fld id="{08A27A93-A3EA-407B-B9A7-8DCE39923709}" type="datetimeFigureOut">
               <a:rPr kumimoji="1" lang="ja-JP" altLang="en-US" smtClean="0"/>
-              <a:t>2026/10/13</a:t>
+              <a:t>2026/10/16</a:t>
             </a:fld>
             <a:endParaRPr kumimoji="1" lang="ja-JP" altLang="en-US"/>
           </a:p>
@@ -3197,7 +3197,7 @@
           <a:p>
             <a:fld id="{08A27A93-A3EA-407B-B9A7-8DCE39923709}" type="datetimeFigureOut">
               <a:rPr kumimoji="1" lang="ja-JP" altLang="en-US" smtClean="0"/>
-              <a:t>2026/10/13</a:t>
+              <a:t>2026/10/16</a:t>
             </a:fld>
             <a:endParaRPr kumimoji="1" lang="ja-JP" altLang="en-US"/>
           </a:p>
@@ -3616,10 +3616,10 @@
       </p:grpSpPr>
       <p:pic>
         <p:nvPicPr>
-          <p:cNvPr id="10" name="図 9">
-            <a:extLst>
-              <a:ext uri="{FF2B5EF4-FFF2-40B4-BE49-F238E27FC236}">
-                <a16:creationId xmlns:a16="http://schemas.microsoft.com/office/drawing/2014/main" id="{77FA785F-89EC-56C9-E906-6CB6E94017D5}"/>
+          <p:cNvPr id="3" name="図 2">
+            <a:extLst>
+              <a:ext uri="{FF2B5EF4-FFF2-40B4-BE49-F238E27FC236}">
+                <a16:creationId xmlns:a16="http://schemas.microsoft.com/office/drawing/2014/main" id="{054ED151-F62F-94BC-21C2-0A29D2ADD28F}"/>
               </a:ext>
             </a:extLst>
           </p:cNvPr>
@@ -3630,14 +3630,14 @@
         </p:nvPicPr>
         <p:blipFill>
           <a:blip r:embed="rId2"/>
-          <a:srcRect t="1809" r="4681" b="2521"/>
+          <a:srcRect l="367"/>
           <a:stretch>
             <a:fillRect/>
           </a:stretch>
         </p:blipFill>
         <p:spPr>
           <a:xfrm>
-            <a:off x="1" y="0"/>
+            <a:off x="0" y="0"/>
             <a:ext cx="12192000" cy="6858000"/>
           </a:xfrm>
           <a:prstGeom prst="rect">

--- a/bkup/Channels/Neural Beats/TMP.pptx
+++ b/bkup/Channels/Neural Beats/TMP.pptx
@@ -259,7 +259,7 @@
           <a:p>
             <a:fld id="{08A27A93-A3EA-407B-B9A7-8DCE39923709}" type="datetimeFigureOut">
               <a:rPr kumimoji="1" lang="ja-JP" altLang="en-US" smtClean="0"/>
-              <a:t>2026/10/16</a:t>
+              <a:t>2026/10/19</a:t>
             </a:fld>
             <a:endParaRPr kumimoji="1" lang="ja-JP" altLang="en-US"/>
           </a:p>
@@ -489,7 +489,7 @@
           <a:p>
             <a:fld id="{08A27A93-A3EA-407B-B9A7-8DCE39923709}" type="datetimeFigureOut">
               <a:rPr kumimoji="1" lang="ja-JP" altLang="en-US" smtClean="0"/>
-              <a:t>2026/10/16</a:t>
+              <a:t>2026/10/19</a:t>
             </a:fld>
             <a:endParaRPr kumimoji="1" lang="ja-JP" altLang="en-US"/>
           </a:p>
@@ -729,7 +729,7 @@
           <a:p>
             <a:fld id="{08A27A93-A3EA-407B-B9A7-8DCE39923709}" type="datetimeFigureOut">
               <a:rPr kumimoji="1" lang="ja-JP" altLang="en-US" smtClean="0"/>
-              <a:t>2026/10/16</a:t>
+              <a:t>2026/10/19</a:t>
             </a:fld>
             <a:endParaRPr kumimoji="1" lang="ja-JP" altLang="en-US"/>
           </a:p>
@@ -959,7 +959,7 @@
           <a:p>
             <a:fld id="{08A27A93-A3EA-407B-B9A7-8DCE39923709}" type="datetimeFigureOut">
               <a:rPr kumimoji="1" lang="ja-JP" altLang="en-US" smtClean="0"/>
-              <a:t>2026/10/16</a:t>
+              <a:t>2026/10/19</a:t>
             </a:fld>
             <a:endParaRPr kumimoji="1" lang="ja-JP" altLang="en-US"/>
           </a:p>
@@ -1234,7 +1234,7 @@
           <a:p>
             <a:fld id="{08A27A93-A3EA-407B-B9A7-8DCE39923709}" type="datetimeFigureOut">
               <a:rPr kumimoji="1" lang="ja-JP" altLang="en-US" smtClean="0"/>
-              <a:t>2026/10/16</a:t>
+              <a:t>2026/10/19</a:t>
             </a:fld>
             <a:endParaRPr kumimoji="1" lang="ja-JP" altLang="en-US"/>
           </a:p>
@@ -1563,7 +1563,7 @@
           <a:p>
             <a:fld id="{08A27A93-A3EA-407B-B9A7-8DCE39923709}" type="datetimeFigureOut">
               <a:rPr kumimoji="1" lang="ja-JP" altLang="en-US" smtClean="0"/>
-              <a:t>2026/10/16</a:t>
+              <a:t>2026/10/19</a:t>
             </a:fld>
             <a:endParaRPr kumimoji="1" lang="ja-JP" altLang="en-US"/>
           </a:p>
@@ -2039,7 +2039,7 @@
           <a:p>
             <a:fld id="{08A27A93-A3EA-407B-B9A7-8DCE39923709}" type="datetimeFigureOut">
               <a:rPr kumimoji="1" lang="ja-JP" altLang="en-US" smtClean="0"/>
-              <a:t>2026/10/16</a:t>
+              <a:t>2026/10/19</a:t>
             </a:fld>
             <a:endParaRPr kumimoji="1" lang="ja-JP" altLang="en-US"/>
           </a:p>
@@ -2180,7 +2180,7 @@
           <a:p>
             <a:fld id="{08A27A93-A3EA-407B-B9A7-8DCE39923709}" type="datetimeFigureOut">
               <a:rPr kumimoji="1" lang="ja-JP" altLang="en-US" smtClean="0"/>
-              <a:t>2026/10/16</a:t>
+              <a:t>2026/10/19</a:t>
             </a:fld>
             <a:endParaRPr kumimoji="1" lang="ja-JP" altLang="en-US"/>
           </a:p>
@@ -2293,7 +2293,7 @@
           <a:p>
             <a:fld id="{08A27A93-A3EA-407B-B9A7-8DCE39923709}" type="datetimeFigureOut">
               <a:rPr kumimoji="1" lang="ja-JP" altLang="en-US" smtClean="0"/>
-              <a:t>2026/10/16</a:t>
+              <a:t>2026/10/19</a:t>
             </a:fld>
             <a:endParaRPr kumimoji="1" lang="ja-JP" altLang="en-US"/>
           </a:p>
@@ -2636,7 +2636,7 @@
           <a:p>
             <a:fld id="{08A27A93-A3EA-407B-B9A7-8DCE39923709}" type="datetimeFigureOut">
               <a:rPr kumimoji="1" lang="ja-JP" altLang="en-US" smtClean="0"/>
-              <a:t>2026/10/16</a:t>
+              <a:t>2026/10/19</a:t>
             </a:fld>
             <a:endParaRPr kumimoji="1" lang="ja-JP" altLang="en-US"/>
           </a:p>
@@ -2924,7 +2924,7 @@
           <a:p>
             <a:fld id="{08A27A93-A3EA-407B-B9A7-8DCE39923709}" type="datetimeFigureOut">
               <a:rPr kumimoji="1" lang="ja-JP" altLang="en-US" smtClean="0"/>
-              <a:t>2026/10/16</a:t>
+              <a:t>2026/10/19</a:t>
             </a:fld>
             <a:endParaRPr kumimoji="1" lang="ja-JP" altLang="en-US"/>
           </a:p>
@@ -3197,7 +3197,7 @@
           <a:p>
             <a:fld id="{08A27A93-A3EA-407B-B9A7-8DCE39923709}" type="datetimeFigureOut">
               <a:rPr kumimoji="1" lang="ja-JP" altLang="en-US" smtClean="0"/>
-              <a:t>2026/10/16</a:t>
+              <a:t>2026/10/19</a:t>
             </a:fld>
             <a:endParaRPr kumimoji="1" lang="ja-JP" altLang="en-US"/>
           </a:p>
@@ -3616,10 +3616,10 @@
       </p:grpSpPr>
       <p:pic>
         <p:nvPicPr>
-          <p:cNvPr id="3" name="図 2">
-            <a:extLst>
-              <a:ext uri="{FF2B5EF4-FFF2-40B4-BE49-F238E27FC236}">
-                <a16:creationId xmlns:a16="http://schemas.microsoft.com/office/drawing/2014/main" id="{054ED151-F62F-94BC-21C2-0A29D2ADD28F}"/>
+          <p:cNvPr id="4" name="図 3">
+            <a:extLst>
+              <a:ext uri="{FF2B5EF4-FFF2-40B4-BE49-F238E27FC236}">
+                <a16:creationId xmlns:a16="http://schemas.microsoft.com/office/drawing/2014/main" id="{C8DE2304-33A5-6A2E-2272-E639B6356415}"/>
               </a:ext>
             </a:extLst>
           </p:cNvPr>
@@ -3630,15 +3630,14 @@
         </p:nvPicPr>
         <p:blipFill>
           <a:blip r:embed="rId2"/>
-          <a:srcRect l="367"/>
           <a:stretch>
             <a:fillRect/>
           </a:stretch>
         </p:blipFill>
         <p:spPr>
           <a:xfrm>
-            <a:off x="0" y="0"/>
-            <a:ext cx="12192000" cy="6858000"/>
+            <a:off x="-1024075" y="-561372"/>
+            <a:ext cx="14240149" cy="7980743"/>
           </a:xfrm>
           <a:prstGeom prst="rect">
             <a:avLst/>

--- a/bkup/Channels/Neural Beats/TMP.pptx
+++ b/bkup/Channels/Neural Beats/TMP.pptx
@@ -259,7 +259,7 @@
           <a:p>
             <a:fld id="{08A27A93-A3EA-407B-B9A7-8DCE39923709}" type="datetimeFigureOut">
               <a:rPr kumimoji="1" lang="ja-JP" altLang="en-US" smtClean="0"/>
-              <a:t>2026/10/19</a:t>
+              <a:t>2026/10/20</a:t>
             </a:fld>
             <a:endParaRPr kumimoji="1" lang="ja-JP" altLang="en-US"/>
           </a:p>
@@ -489,7 +489,7 @@
           <a:p>
             <a:fld id="{08A27A93-A3EA-407B-B9A7-8DCE39923709}" type="datetimeFigureOut">
               <a:rPr kumimoji="1" lang="ja-JP" altLang="en-US" smtClean="0"/>
-              <a:t>2026/10/19</a:t>
+              <a:t>2026/10/20</a:t>
             </a:fld>
             <a:endParaRPr kumimoji="1" lang="ja-JP" altLang="en-US"/>
           </a:p>
@@ -729,7 +729,7 @@
           <a:p>
             <a:fld id="{08A27A93-A3EA-407B-B9A7-8DCE39923709}" type="datetimeFigureOut">
               <a:rPr kumimoji="1" lang="ja-JP" altLang="en-US" smtClean="0"/>
-              <a:t>2026/10/19</a:t>
+              <a:t>2026/10/20</a:t>
             </a:fld>
             <a:endParaRPr kumimoji="1" lang="ja-JP" altLang="en-US"/>
           </a:p>
@@ -959,7 +959,7 @@
           <a:p>
             <a:fld id="{08A27A93-A3EA-407B-B9A7-8DCE39923709}" type="datetimeFigureOut">
               <a:rPr kumimoji="1" lang="ja-JP" altLang="en-US" smtClean="0"/>
-              <a:t>2026/10/19</a:t>
+              <a:t>2026/10/20</a:t>
             </a:fld>
             <a:endParaRPr kumimoji="1" lang="ja-JP" altLang="en-US"/>
           </a:p>
@@ -1234,7 +1234,7 @@
           <a:p>
             <a:fld id="{08A27A93-A3EA-407B-B9A7-8DCE39923709}" type="datetimeFigureOut">
               <a:rPr kumimoji="1" lang="ja-JP" altLang="en-US" smtClean="0"/>
-              <a:t>2026/10/19</a:t>
+              <a:t>2026/10/20</a:t>
             </a:fld>
             <a:endParaRPr kumimoji="1" lang="ja-JP" altLang="en-US"/>
           </a:p>
@@ -1563,7 +1563,7 @@
           <a:p>
             <a:fld id="{08A27A93-A3EA-407B-B9A7-8DCE39923709}" type="datetimeFigureOut">
               <a:rPr kumimoji="1" lang="ja-JP" altLang="en-US" smtClean="0"/>
-              <a:t>2026/10/19</a:t>
+              <a:t>2026/10/20</a:t>
             </a:fld>
             <a:endParaRPr kumimoji="1" lang="ja-JP" altLang="en-US"/>
           </a:p>
@@ -2039,7 +2039,7 @@
           <a:p>
             <a:fld id="{08A27A93-A3EA-407B-B9A7-8DCE39923709}" type="datetimeFigureOut">
               <a:rPr kumimoji="1" lang="ja-JP" altLang="en-US" smtClean="0"/>
-              <a:t>2026/10/19</a:t>
+              <a:t>2026/10/20</a:t>
             </a:fld>
             <a:endParaRPr kumimoji="1" lang="ja-JP" altLang="en-US"/>
           </a:p>
@@ -2180,7 +2180,7 @@
           <a:p>
             <a:fld id="{08A27A93-A3EA-407B-B9A7-8DCE39923709}" type="datetimeFigureOut">
               <a:rPr kumimoji="1" lang="ja-JP" altLang="en-US" smtClean="0"/>
-              <a:t>2026/10/19</a:t>
+              <a:t>2026/10/20</a:t>
             </a:fld>
             <a:endParaRPr kumimoji="1" lang="ja-JP" altLang="en-US"/>
           </a:p>
@@ -2293,7 +2293,7 @@
           <a:p>
             <a:fld id="{08A27A93-A3EA-407B-B9A7-8DCE39923709}" type="datetimeFigureOut">
               <a:rPr kumimoji="1" lang="ja-JP" altLang="en-US" smtClean="0"/>
-              <a:t>2026/10/19</a:t>
+              <a:t>2026/10/20</a:t>
             </a:fld>
             <a:endParaRPr kumimoji="1" lang="ja-JP" altLang="en-US"/>
           </a:p>
@@ -2636,7 +2636,7 @@
           <a:p>
             <a:fld id="{08A27A93-A3EA-407B-B9A7-8DCE39923709}" type="datetimeFigureOut">
               <a:rPr kumimoji="1" lang="ja-JP" altLang="en-US" smtClean="0"/>
-              <a:t>2026/10/19</a:t>
+              <a:t>2026/10/20</a:t>
             </a:fld>
             <a:endParaRPr kumimoji="1" lang="ja-JP" altLang="en-US"/>
           </a:p>
@@ -2924,7 +2924,7 @@
           <a:p>
             <a:fld id="{08A27A93-A3EA-407B-B9A7-8DCE39923709}" type="datetimeFigureOut">
               <a:rPr kumimoji="1" lang="ja-JP" altLang="en-US" smtClean="0"/>
-              <a:t>2026/10/19</a:t>
+              <a:t>2026/10/20</a:t>
             </a:fld>
             <a:endParaRPr kumimoji="1" lang="ja-JP" altLang="en-US"/>
           </a:p>
@@ -3197,7 +3197,7 @@
           <a:p>
             <a:fld id="{08A27A93-A3EA-407B-B9A7-8DCE39923709}" type="datetimeFigureOut">
               <a:rPr kumimoji="1" lang="ja-JP" altLang="en-US" smtClean="0"/>
-              <a:t>2026/10/19</a:t>
+              <a:t>2026/10/20</a:t>
             </a:fld>
             <a:endParaRPr kumimoji="1" lang="ja-JP" altLang="en-US"/>
           </a:p>
@@ -3616,10 +3616,10 @@
       </p:grpSpPr>
       <p:pic>
         <p:nvPicPr>
-          <p:cNvPr id="4" name="図 3">
-            <a:extLst>
-              <a:ext uri="{FF2B5EF4-FFF2-40B4-BE49-F238E27FC236}">
-                <a16:creationId xmlns:a16="http://schemas.microsoft.com/office/drawing/2014/main" id="{C8DE2304-33A5-6A2E-2272-E639B6356415}"/>
+          <p:cNvPr id="3" name="図 2">
+            <a:extLst>
+              <a:ext uri="{FF2B5EF4-FFF2-40B4-BE49-F238E27FC236}">
+                <a16:creationId xmlns:a16="http://schemas.microsoft.com/office/drawing/2014/main" id="{6A53EDF0-4492-2DE8-64C4-F1BA02233B98}"/>
               </a:ext>
             </a:extLst>
           </p:cNvPr>
@@ -3630,14 +3630,15 @@
         </p:nvPicPr>
         <p:blipFill>
           <a:blip r:embed="rId2"/>
+          <a:srcRect l="183" r="183"/>
           <a:stretch>
             <a:fillRect/>
           </a:stretch>
         </p:blipFill>
         <p:spPr>
           <a:xfrm>
-            <a:off x="-1024075" y="-561372"/>
-            <a:ext cx="14240149" cy="7980743"/>
+            <a:off x="0" y="0"/>
+            <a:ext cx="12192000" cy="6858000"/>
           </a:xfrm>
           <a:prstGeom prst="rect">
             <a:avLst/>
